--- a/writing/v2/Digital-Minds-Sprint-Slides-v2.pptx
+++ b/writing/v2/Digital-Minds-Sprint-Slides-v2.pptx
@@ -7410,7 +7410,7 @@
                 </a:solidFill>
                 <a:latin typeface="Calibri"/>
               </a:rPr>
-              <a:t> 44 adapters in the public release (not "~370"); most archives lost with two sandboxes; the E16 v2 map regenerated from source (60 adapters restored on the compute host, being mirrored); regeneration and REP02 results read on the host, not yet committed.</a:t>
+              <a:t> 44 adapters in the public release (not "~370"); most archives lost with two sandboxes; the E16 v2 map regenerated from source and reproduced its table — then the host was lost before the JSON or the 60 adapters were pulled; what remains is the recorded scorer output.</a:t>
             </a:r>
           </a:p>
         </p:txBody>
